--- a/Summary_files/myG_datasets.pptx
+++ b/Summary_files/myG_datasets.pptx
@@ -105,7 +105,41 @@
       </a:defRPr>
     </a:lvl9pPr>
   </p:defaultTextStyle>
+  <p:extLst>
+    <p:ext uri="{EFAFB233-063F-42B5-8137-9DF3F51BA10A}">
+      <p15:sldGuideLst xmlns:p15="http://schemas.microsoft.com/office/powerpoint/2012/main"/>
+    </p:ext>
+  </p:extLst>
 </p:presentation>
+</file>
+
+<file path=ppt/changesInfos/changesInfo1.xml><?xml version="1.0" encoding="utf-8"?>
+<pc:chgInfo xmlns:a="http://schemas.openxmlformats.org/drawingml/2006/main" xmlns:r="http://schemas.openxmlformats.org/officeDocument/2006/relationships" xmlns:ac="http://schemas.microsoft.com/office/drawing/2013/main/command" xmlns:pc="http://schemas.microsoft.com/office/powerpoint/2013/main/command">
+  <pc:docChgLst>
+    <pc:chgData name="Osuna Caballero, Salvador" userId="31a72479-bada-497d-8d52-8135df6f40fd" providerId="ADAL" clId="{D2B66155-CD56-4707-941E-ED29011F1011}"/>
+    <pc:docChg chg="modSld">
+      <pc:chgData name="Osuna Caballero, Salvador" userId="31a72479-bada-497d-8d52-8135df6f40fd" providerId="ADAL" clId="{D2B66155-CD56-4707-941E-ED29011F1011}" dt="2026-03-02T16:05:36.786" v="3" actId="1076"/>
+      <pc:docMkLst>
+        <pc:docMk/>
+      </pc:docMkLst>
+      <pc:sldChg chg="addSp modSp mod">
+        <pc:chgData name="Osuna Caballero, Salvador" userId="31a72479-bada-497d-8d52-8135df6f40fd" providerId="ADAL" clId="{D2B66155-CD56-4707-941E-ED29011F1011}" dt="2026-03-02T16:05:36.786" v="3" actId="1076"/>
+        <pc:sldMkLst>
+          <pc:docMk/>
+          <pc:sldMk cId="1467065501" sldId="257"/>
+        </pc:sldMkLst>
+        <pc:picChg chg="add mod">
+          <ac:chgData name="Osuna Caballero, Salvador" userId="31a72479-bada-497d-8d52-8135df6f40fd" providerId="ADAL" clId="{D2B66155-CD56-4707-941E-ED29011F1011}" dt="2026-03-02T16:05:36.786" v="3" actId="1076"/>
+          <ac:picMkLst>
+            <pc:docMk/>
+            <pc:sldMk cId="1467065501" sldId="257"/>
+            <ac:picMk id="3" creationId="{7DDA876C-5882-330C-4979-4C11869ED8EB}"/>
+          </ac:picMkLst>
+        </pc:picChg>
+      </pc:sldChg>
+    </pc:docChg>
+  </pc:docChgLst>
+</pc:chgInfo>
 </file>
 
 <file path=ppt/slideLayouts/slideLayout1.xml><?xml version="1.0" encoding="utf-8"?>
@@ -255,7 +289,7 @@
           <a:p>
             <a:fld id="{6B94717B-0164-4AB7-833C-17E8EBBB838C}" type="datetimeFigureOut">
               <a:rPr lang="en-US" smtClean="0"/>
-              <a:t>2/23/2026</a:t>
+              <a:t>3/2/2026</a:t>
             </a:fld>
             <a:endParaRPr lang="en-US"/>
           </a:p>
@@ -453,7 +487,7 @@
           <a:p>
             <a:fld id="{6B94717B-0164-4AB7-833C-17E8EBBB838C}" type="datetimeFigureOut">
               <a:rPr lang="en-US" smtClean="0"/>
-              <a:t>2/23/2026</a:t>
+              <a:t>3/2/2026</a:t>
             </a:fld>
             <a:endParaRPr lang="en-US"/>
           </a:p>
@@ -661,7 +695,7 @@
           <a:p>
             <a:fld id="{6B94717B-0164-4AB7-833C-17E8EBBB838C}" type="datetimeFigureOut">
               <a:rPr lang="en-US" smtClean="0"/>
-              <a:t>2/23/2026</a:t>
+              <a:t>3/2/2026</a:t>
             </a:fld>
             <a:endParaRPr lang="en-US"/>
           </a:p>
@@ -859,7 +893,7 @@
           <a:p>
             <a:fld id="{6B94717B-0164-4AB7-833C-17E8EBBB838C}" type="datetimeFigureOut">
               <a:rPr lang="en-US" smtClean="0"/>
-              <a:t>2/23/2026</a:t>
+              <a:t>3/2/2026</a:t>
             </a:fld>
             <a:endParaRPr lang="en-US"/>
           </a:p>
@@ -1134,7 +1168,7 @@
           <a:p>
             <a:fld id="{6B94717B-0164-4AB7-833C-17E8EBBB838C}" type="datetimeFigureOut">
               <a:rPr lang="en-US" smtClean="0"/>
-              <a:t>2/23/2026</a:t>
+              <a:t>3/2/2026</a:t>
             </a:fld>
             <a:endParaRPr lang="en-US"/>
           </a:p>
@@ -1399,7 +1433,7 @@
           <a:p>
             <a:fld id="{6B94717B-0164-4AB7-833C-17E8EBBB838C}" type="datetimeFigureOut">
               <a:rPr lang="en-US" smtClean="0"/>
-              <a:t>2/23/2026</a:t>
+              <a:t>3/2/2026</a:t>
             </a:fld>
             <a:endParaRPr lang="en-US"/>
           </a:p>
@@ -1811,7 +1845,7 @@
           <a:p>
             <a:fld id="{6B94717B-0164-4AB7-833C-17E8EBBB838C}" type="datetimeFigureOut">
               <a:rPr lang="en-US" smtClean="0"/>
-              <a:t>2/23/2026</a:t>
+              <a:t>3/2/2026</a:t>
             </a:fld>
             <a:endParaRPr lang="en-US"/>
           </a:p>
@@ -1952,7 +1986,7 @@
           <a:p>
             <a:fld id="{6B94717B-0164-4AB7-833C-17E8EBBB838C}" type="datetimeFigureOut">
               <a:rPr lang="en-US" smtClean="0"/>
-              <a:t>2/23/2026</a:t>
+              <a:t>3/2/2026</a:t>
             </a:fld>
             <a:endParaRPr lang="en-US"/>
           </a:p>
@@ -2065,7 +2099,7 @@
           <a:p>
             <a:fld id="{6B94717B-0164-4AB7-833C-17E8EBBB838C}" type="datetimeFigureOut">
               <a:rPr lang="en-US" smtClean="0"/>
-              <a:t>2/23/2026</a:t>
+              <a:t>3/2/2026</a:t>
             </a:fld>
             <a:endParaRPr lang="en-US"/>
           </a:p>
@@ -2376,7 +2410,7 @@
           <a:p>
             <a:fld id="{6B94717B-0164-4AB7-833C-17E8EBBB838C}" type="datetimeFigureOut">
               <a:rPr lang="en-US" smtClean="0"/>
-              <a:t>2/23/2026</a:t>
+              <a:t>3/2/2026</a:t>
             </a:fld>
             <a:endParaRPr lang="en-US"/>
           </a:p>
@@ -2664,7 +2698,7 @@
           <a:p>
             <a:fld id="{6B94717B-0164-4AB7-833C-17E8EBBB838C}" type="datetimeFigureOut">
               <a:rPr lang="en-US" smtClean="0"/>
-              <a:t>2/23/2026</a:t>
+              <a:t>3/2/2026</a:t>
             </a:fld>
             <a:endParaRPr lang="en-US"/>
           </a:p>
@@ -2905,7 +2939,7 @@
           <a:p>
             <a:fld id="{6B94717B-0164-4AB7-833C-17E8EBBB838C}" type="datetimeFigureOut">
               <a:rPr lang="en-US" smtClean="0"/>
-              <a:t>2/23/2026</a:t>
+              <a:t>3/2/2026</a:t>
             </a:fld>
             <a:endParaRPr lang="en-US"/>
           </a:p>
@@ -4857,6 +4891,36 @@
           </a:fontRef>
         </p:style>
       </p:cxnSp>
+      <p:pic>
+        <p:nvPicPr>
+          <p:cNvPr id="3" name="Picture 2">
+            <a:extLst>
+              <a:ext uri="{FF2B5EF4-FFF2-40B4-BE49-F238E27FC236}">
+                <a16:creationId xmlns:a16="http://schemas.microsoft.com/office/drawing/2014/main" id="{7DDA876C-5882-330C-4979-4C11869ED8EB}"/>
+              </a:ext>
+            </a:extLst>
+          </p:cNvPr>
+          <p:cNvPicPr>
+            <a:picLocks noChangeAspect="1"/>
+          </p:cNvPicPr>
+          <p:nvPr/>
+        </p:nvPicPr>
+        <p:blipFill>
+          <a:blip r:embed="rId3"/>
+          <a:stretch>
+            <a:fillRect/>
+          </a:stretch>
+        </p:blipFill>
+        <p:spPr>
+          <a:xfrm>
+            <a:off x="66380" y="2181272"/>
+            <a:ext cx="12059240" cy="1975943"/>
+          </a:xfrm>
+          <a:prstGeom prst="rect">
+            <a:avLst/>
+          </a:prstGeom>
+        </p:spPr>
+      </p:pic>
     </p:spTree>
     <p:extLst>
       <p:ext uri="{BB962C8B-B14F-4D97-AF65-F5344CB8AC3E}">

--- a/Summary_files/myG_datasets.pptx
+++ b/Summary_files/myG_datasets.pptx
@@ -7,6 +7,7 @@
   <p:sldIdLst>
     <p:sldId id="256" r:id="rId2"/>
     <p:sldId id="257" r:id="rId3"/>
+    <p:sldId id="258" r:id="rId4"/>
   </p:sldIdLst>
   <p:sldSz cx="12192000" cy="6858000"/>
   <p:notesSz cx="6858000" cy="9144000"/>
@@ -113,6 +114,14 @@
 </p:presentation>
 </file>
 
+<file path=ppt/revisionInfo.xml><?xml version="1.0" encoding="utf-8"?>
+<p1510:revInfo xmlns:a="http://schemas.openxmlformats.org/drawingml/2006/main" xmlns:r="http://schemas.openxmlformats.org/officeDocument/2006/relationships" xmlns:p1510="http://schemas.microsoft.com/office/powerpoint/2015/10/main">
+  <p1510:revLst>
+    <p1510:client id="{1328B3E3-7AB2-4429-BE15-956D6BDF891D}" v="15" dt="2026-03-24T17:04:12.968"/>
+  </p1510:revLst>
+</p1510:revInfo>
+</file>
+
 <file path=ppt/changesInfos/changesInfo1.xml><?xml version="1.0" encoding="utf-8"?>
 <pc:chgInfo xmlns:a="http://schemas.openxmlformats.org/drawingml/2006/main" xmlns:r="http://schemas.openxmlformats.org/officeDocument/2006/relationships" xmlns:ac="http://schemas.microsoft.com/office/drawing/2013/main/command" xmlns:pc="http://schemas.microsoft.com/office/powerpoint/2013/main/command">
   <pc:docChgLst>
@@ -139,6 +148,150 @@
       </pc:sldChg>
     </pc:docChg>
   </pc:docChgLst>
+  <pc:docChgLst>
+    <pc:chgData name="Osuna Caballero, Salvador" userId="31a72479-bada-497d-8d52-8135df6f40fd" providerId="ADAL" clId="{A193FB44-5427-4021-BB49-C378ACCCCB1C}"/>
+    <pc:docChg chg="undo custSel addSld modSld">
+      <pc:chgData name="Osuna Caballero, Salvador" userId="31a72479-bada-497d-8d52-8135df6f40fd" providerId="ADAL" clId="{A193FB44-5427-4021-BB49-C378ACCCCB1C}" dt="2026-03-24T17:04:12.968" v="204" actId="164"/>
+      <pc:docMkLst>
+        <pc:docMk/>
+      </pc:docMkLst>
+      <pc:sldChg chg="addSp delSp modSp new mod">
+        <pc:chgData name="Osuna Caballero, Salvador" userId="31a72479-bada-497d-8d52-8135df6f40fd" providerId="ADAL" clId="{A193FB44-5427-4021-BB49-C378ACCCCB1C}" dt="2026-03-24T17:04:12.968" v="204" actId="164"/>
+        <pc:sldMkLst>
+          <pc:docMk/>
+          <pc:sldMk cId="3650395769" sldId="258"/>
+        </pc:sldMkLst>
+        <pc:spChg chg="del">
+          <ac:chgData name="Osuna Caballero, Salvador" userId="31a72479-bada-497d-8d52-8135df6f40fd" providerId="ADAL" clId="{A193FB44-5427-4021-BB49-C378ACCCCB1C}" dt="2026-03-24T16:08:16.523" v="2" actId="478"/>
+          <ac:spMkLst>
+            <pc:docMk/>
+            <pc:sldMk cId="3650395769" sldId="258"/>
+            <ac:spMk id="2" creationId="{C4E7C7E0-D808-B0BF-8120-CBD7E508C76F}"/>
+          </ac:spMkLst>
+        </pc:spChg>
+        <pc:spChg chg="del">
+          <ac:chgData name="Osuna Caballero, Salvador" userId="31a72479-bada-497d-8d52-8135df6f40fd" providerId="ADAL" clId="{A193FB44-5427-4021-BB49-C378ACCCCB1C}" dt="2026-03-24T16:08:16.068" v="1" actId="478"/>
+          <ac:spMkLst>
+            <pc:docMk/>
+            <pc:sldMk cId="3650395769" sldId="258"/>
+            <ac:spMk id="3" creationId="{40F716F6-4985-6C1B-AB1B-52519622B854}"/>
+          </ac:spMkLst>
+        </pc:spChg>
+        <pc:spChg chg="add mod ord topLvl">
+          <ac:chgData name="Osuna Caballero, Salvador" userId="31a72479-bada-497d-8d52-8135df6f40fd" providerId="ADAL" clId="{A193FB44-5427-4021-BB49-C378ACCCCB1C}" dt="2026-03-24T17:04:12.968" v="204" actId="164"/>
+          <ac:spMkLst>
+            <pc:docMk/>
+            <pc:sldMk cId="3650395769" sldId="258"/>
+            <ac:spMk id="8" creationId="{ED71EDC8-6D51-643D-A342-35BDB405F7D7}"/>
+          </ac:spMkLst>
+        </pc:spChg>
+        <pc:spChg chg="add mod ord topLvl">
+          <ac:chgData name="Osuna Caballero, Salvador" userId="31a72479-bada-497d-8d52-8135df6f40fd" providerId="ADAL" clId="{A193FB44-5427-4021-BB49-C378ACCCCB1C}" dt="2026-03-24T17:04:12.968" v="204" actId="164"/>
+          <ac:spMkLst>
+            <pc:docMk/>
+            <pc:sldMk cId="3650395769" sldId="258"/>
+            <ac:spMk id="9" creationId="{68EB16C6-C17E-8D4A-D26A-646B27EC132F}"/>
+          </ac:spMkLst>
+        </pc:spChg>
+        <pc:spChg chg="add mod ord topLvl">
+          <ac:chgData name="Osuna Caballero, Salvador" userId="31a72479-bada-497d-8d52-8135df6f40fd" providerId="ADAL" clId="{A193FB44-5427-4021-BB49-C378ACCCCB1C}" dt="2026-03-24T17:04:12.968" v="204" actId="164"/>
+          <ac:spMkLst>
+            <pc:docMk/>
+            <pc:sldMk cId="3650395769" sldId="258"/>
+            <ac:spMk id="10" creationId="{6C92975F-DC7E-B199-0370-504811CB8AF4}"/>
+          </ac:spMkLst>
+        </pc:spChg>
+        <pc:spChg chg="add mod ord topLvl">
+          <ac:chgData name="Osuna Caballero, Salvador" userId="31a72479-bada-497d-8d52-8135df6f40fd" providerId="ADAL" clId="{A193FB44-5427-4021-BB49-C378ACCCCB1C}" dt="2026-03-24T17:04:12.968" v="204" actId="164"/>
+          <ac:spMkLst>
+            <pc:docMk/>
+            <pc:sldMk cId="3650395769" sldId="258"/>
+            <ac:spMk id="11" creationId="{BD263C1A-14BF-E87D-2939-1E9E3407EE8F}"/>
+          </ac:spMkLst>
+        </pc:spChg>
+        <pc:spChg chg="add mod ord topLvl">
+          <ac:chgData name="Osuna Caballero, Salvador" userId="31a72479-bada-497d-8d52-8135df6f40fd" providerId="ADAL" clId="{A193FB44-5427-4021-BB49-C378ACCCCB1C}" dt="2026-03-24T17:04:12.968" v="204" actId="164"/>
+          <ac:spMkLst>
+            <pc:docMk/>
+            <pc:sldMk cId="3650395769" sldId="258"/>
+            <ac:spMk id="12" creationId="{D2F9BAE7-CF8A-2FDC-351C-1AFB73521164}"/>
+          </ac:spMkLst>
+        </pc:spChg>
+        <pc:spChg chg="add mod ord topLvl">
+          <ac:chgData name="Osuna Caballero, Salvador" userId="31a72479-bada-497d-8d52-8135df6f40fd" providerId="ADAL" clId="{A193FB44-5427-4021-BB49-C378ACCCCB1C}" dt="2026-03-24T17:04:12.968" v="204" actId="164"/>
+          <ac:spMkLst>
+            <pc:docMk/>
+            <pc:sldMk cId="3650395769" sldId="258"/>
+            <ac:spMk id="13" creationId="{3CCEB87B-EC93-A916-6463-8980CDE9B58A}"/>
+          </ac:spMkLst>
+        </pc:spChg>
+        <pc:spChg chg="add mod">
+          <ac:chgData name="Osuna Caballero, Salvador" userId="31a72479-bada-497d-8d52-8135df6f40fd" providerId="ADAL" clId="{A193FB44-5427-4021-BB49-C378ACCCCB1C}" dt="2026-03-24T17:04:12.968" v="204" actId="164"/>
+          <ac:spMkLst>
+            <pc:docMk/>
+            <pc:sldMk cId="3650395769" sldId="258"/>
+            <ac:spMk id="20" creationId="{D5B2B62B-2DD0-B9A8-9282-9D278D199A79}"/>
+          </ac:spMkLst>
+        </pc:spChg>
+        <pc:spChg chg="add mod">
+          <ac:chgData name="Osuna Caballero, Salvador" userId="31a72479-bada-497d-8d52-8135df6f40fd" providerId="ADAL" clId="{A193FB44-5427-4021-BB49-C378ACCCCB1C}" dt="2026-03-24T17:04:12.968" v="204" actId="164"/>
+          <ac:spMkLst>
+            <pc:docMk/>
+            <pc:sldMk cId="3650395769" sldId="258"/>
+            <ac:spMk id="21" creationId="{16576459-7AA9-18F0-73CE-B2BAF981B571}"/>
+          </ac:spMkLst>
+        </pc:spChg>
+        <pc:grpChg chg="add del mod">
+          <ac:chgData name="Osuna Caballero, Salvador" userId="31a72479-bada-497d-8d52-8135df6f40fd" providerId="ADAL" clId="{A193FB44-5427-4021-BB49-C378ACCCCB1C}" dt="2026-03-24T17:00:33.978" v="115" actId="165"/>
+          <ac:grpSpMkLst>
+            <pc:docMk/>
+            <pc:sldMk cId="3650395769" sldId="258"/>
+            <ac:grpSpMk id="14" creationId="{83FA50D9-CB8C-EB3B-437C-83BBE5CA5158}"/>
+          </ac:grpSpMkLst>
+        </pc:grpChg>
+        <pc:picChg chg="add mod topLvl">
+          <ac:chgData name="Osuna Caballero, Salvador" userId="31a72479-bada-497d-8d52-8135df6f40fd" providerId="ADAL" clId="{A193FB44-5427-4021-BB49-C378ACCCCB1C}" dt="2026-03-24T17:04:12.968" v="204" actId="164"/>
+          <ac:picMkLst>
+            <pc:docMk/>
+            <pc:sldMk cId="3650395769" sldId="258"/>
+            <ac:picMk id="5" creationId="{9D5F1B53-710F-AD3B-ACD3-4B6BF2870AAE}"/>
+          </ac:picMkLst>
+        </pc:picChg>
+        <pc:picChg chg="add mod ord topLvl">
+          <ac:chgData name="Osuna Caballero, Salvador" userId="31a72479-bada-497d-8d52-8135df6f40fd" providerId="ADAL" clId="{A193FB44-5427-4021-BB49-C378ACCCCB1C}" dt="2026-03-24T17:03:05.947" v="154" actId="1036"/>
+          <ac:picMkLst>
+            <pc:docMk/>
+            <pc:sldMk cId="3650395769" sldId="258"/>
+            <ac:picMk id="7" creationId="{4D46E6DB-E8D5-CFA2-DE19-5E0DD60D4D7B}"/>
+          </ac:picMkLst>
+        </pc:picChg>
+        <pc:picChg chg="add del mod">
+          <ac:chgData name="Osuna Caballero, Salvador" userId="31a72479-bada-497d-8d52-8135df6f40fd" providerId="ADAL" clId="{A193FB44-5427-4021-BB49-C378ACCCCB1C}" dt="2026-03-24T16:51:59.307" v="95" actId="478"/>
+          <ac:picMkLst>
+            <pc:docMk/>
+            <pc:sldMk cId="3650395769" sldId="258"/>
+            <ac:picMk id="16" creationId="{EC9BA0EF-39E0-2EA5-36A4-AFC345F10446}"/>
+          </ac:picMkLst>
+        </pc:picChg>
+        <pc:picChg chg="add mod">
+          <ac:chgData name="Osuna Caballero, Salvador" userId="31a72479-bada-497d-8d52-8135df6f40fd" providerId="ADAL" clId="{A193FB44-5427-4021-BB49-C378ACCCCB1C}" dt="2026-03-24T17:02:02.509" v="122" actId="1076"/>
+          <ac:picMkLst>
+            <pc:docMk/>
+            <pc:sldMk cId="3650395769" sldId="258"/>
+            <ac:picMk id="18" creationId="{313FF7A6-60C0-7496-0780-504CB704A136}"/>
+          </ac:picMkLst>
+        </pc:picChg>
+        <pc:picChg chg="add mod modCrop">
+          <ac:chgData name="Osuna Caballero, Salvador" userId="31a72479-bada-497d-8d52-8135df6f40fd" providerId="ADAL" clId="{A193FB44-5427-4021-BB49-C378ACCCCB1C}" dt="2026-03-24T17:04:12.968" v="204" actId="164"/>
+          <ac:picMkLst>
+            <pc:docMk/>
+            <pc:sldMk cId="3650395769" sldId="258"/>
+            <ac:picMk id="19" creationId="{76E23561-E60F-A30F-31B2-8D0977207440}"/>
+          </ac:picMkLst>
+        </pc:picChg>
+      </pc:sldChg>
+    </pc:docChg>
+  </pc:docChgLst>
 </pc:chgInfo>
 </file>
 
@@ -289,7 +442,7 @@
           <a:p>
             <a:fld id="{6B94717B-0164-4AB7-833C-17E8EBBB838C}" type="datetimeFigureOut">
               <a:rPr lang="en-US" smtClean="0"/>
-              <a:t>3/2/2026</a:t>
+              <a:t>3/24/2026</a:t>
             </a:fld>
             <a:endParaRPr lang="en-US"/>
           </a:p>
@@ -487,7 +640,7 @@
           <a:p>
             <a:fld id="{6B94717B-0164-4AB7-833C-17E8EBBB838C}" type="datetimeFigureOut">
               <a:rPr lang="en-US" smtClean="0"/>
-              <a:t>3/2/2026</a:t>
+              <a:t>3/24/2026</a:t>
             </a:fld>
             <a:endParaRPr lang="en-US"/>
           </a:p>
@@ -695,7 +848,7 @@
           <a:p>
             <a:fld id="{6B94717B-0164-4AB7-833C-17E8EBBB838C}" type="datetimeFigureOut">
               <a:rPr lang="en-US" smtClean="0"/>
-              <a:t>3/2/2026</a:t>
+              <a:t>3/24/2026</a:t>
             </a:fld>
             <a:endParaRPr lang="en-US"/>
           </a:p>
@@ -893,7 +1046,7 @@
           <a:p>
             <a:fld id="{6B94717B-0164-4AB7-833C-17E8EBBB838C}" type="datetimeFigureOut">
               <a:rPr lang="en-US" smtClean="0"/>
-              <a:t>3/2/2026</a:t>
+              <a:t>3/24/2026</a:t>
             </a:fld>
             <a:endParaRPr lang="en-US"/>
           </a:p>
@@ -1168,7 +1321,7 @@
           <a:p>
             <a:fld id="{6B94717B-0164-4AB7-833C-17E8EBBB838C}" type="datetimeFigureOut">
               <a:rPr lang="en-US" smtClean="0"/>
-              <a:t>3/2/2026</a:t>
+              <a:t>3/24/2026</a:t>
             </a:fld>
             <a:endParaRPr lang="en-US"/>
           </a:p>
@@ -1433,7 +1586,7 @@
           <a:p>
             <a:fld id="{6B94717B-0164-4AB7-833C-17E8EBBB838C}" type="datetimeFigureOut">
               <a:rPr lang="en-US" smtClean="0"/>
-              <a:t>3/2/2026</a:t>
+              <a:t>3/24/2026</a:t>
             </a:fld>
             <a:endParaRPr lang="en-US"/>
           </a:p>
@@ -1845,7 +1998,7 @@
           <a:p>
             <a:fld id="{6B94717B-0164-4AB7-833C-17E8EBBB838C}" type="datetimeFigureOut">
               <a:rPr lang="en-US" smtClean="0"/>
-              <a:t>3/2/2026</a:t>
+              <a:t>3/24/2026</a:t>
             </a:fld>
             <a:endParaRPr lang="en-US"/>
           </a:p>
@@ -1986,7 +2139,7 @@
           <a:p>
             <a:fld id="{6B94717B-0164-4AB7-833C-17E8EBBB838C}" type="datetimeFigureOut">
               <a:rPr lang="en-US" smtClean="0"/>
-              <a:t>3/2/2026</a:t>
+              <a:t>3/24/2026</a:t>
             </a:fld>
             <a:endParaRPr lang="en-US"/>
           </a:p>
@@ -2099,7 +2252,7 @@
           <a:p>
             <a:fld id="{6B94717B-0164-4AB7-833C-17E8EBBB838C}" type="datetimeFigureOut">
               <a:rPr lang="en-US" smtClean="0"/>
-              <a:t>3/2/2026</a:t>
+              <a:t>3/24/2026</a:t>
             </a:fld>
             <a:endParaRPr lang="en-US"/>
           </a:p>
@@ -2410,7 +2563,7 @@
           <a:p>
             <a:fld id="{6B94717B-0164-4AB7-833C-17E8EBBB838C}" type="datetimeFigureOut">
               <a:rPr lang="en-US" smtClean="0"/>
-              <a:t>3/2/2026</a:t>
+              <a:t>3/24/2026</a:t>
             </a:fld>
             <a:endParaRPr lang="en-US"/>
           </a:p>
@@ -2698,7 +2851,7 @@
           <a:p>
             <a:fld id="{6B94717B-0164-4AB7-833C-17E8EBBB838C}" type="datetimeFigureOut">
               <a:rPr lang="en-US" smtClean="0"/>
-              <a:t>3/2/2026</a:t>
+              <a:t>3/24/2026</a:t>
             </a:fld>
             <a:endParaRPr lang="en-US"/>
           </a:p>
@@ -2939,7 +3092,7 @@
           <a:p>
             <a:fld id="{6B94717B-0164-4AB7-833C-17E8EBBB838C}" type="datetimeFigureOut">
               <a:rPr lang="en-US" smtClean="0"/>
-              <a:t>3/2/2026</a:t>
+              <a:t>3/24/2026</a:t>
             </a:fld>
             <a:endParaRPr lang="en-US"/>
           </a:p>
@@ -4925,6 +5078,566 @@
     <p:extLst>
       <p:ext uri="{BB962C8B-B14F-4D97-AF65-F5344CB8AC3E}">
         <p14:creationId xmlns:p14="http://schemas.microsoft.com/office/powerpoint/2010/main" val="1467065501"/>
+      </p:ext>
+    </p:extLst>
+  </p:cSld>
+  <p:clrMapOvr>
+    <a:masterClrMapping/>
+  </p:clrMapOvr>
+</p:sld>
+</file>
+
+<file path=ppt/slides/slide3.xml><?xml version="1.0" encoding="utf-8"?>
+<p:sld xmlns:a="http://schemas.openxmlformats.org/drawingml/2006/main" xmlns:r="http://schemas.openxmlformats.org/officeDocument/2006/relationships" xmlns:p="http://schemas.openxmlformats.org/presentationml/2006/main">
+  <p:cSld>
+    <p:spTree>
+      <p:nvGrpSpPr>
+        <p:cNvPr id="1" name=""/>
+        <p:cNvGrpSpPr/>
+        <p:nvPr/>
+      </p:nvGrpSpPr>
+      <p:grpSpPr>
+        <a:xfrm>
+          <a:off x="0" y="0"/>
+          <a:ext cx="0" cy="0"/>
+          <a:chOff x="0" y="0"/>
+          <a:chExt cx="0" cy="0"/>
+        </a:xfrm>
+      </p:grpSpPr>
+      <p:grpSp>
+        <p:nvGrpSpPr>
+          <p:cNvPr id="22" name="Group 21">
+            <a:extLst>
+              <a:ext uri="{FF2B5EF4-FFF2-40B4-BE49-F238E27FC236}">
+                <a16:creationId xmlns:a16="http://schemas.microsoft.com/office/drawing/2014/main" id="{ECFB7BC4-4F38-6483-81AA-2AA043FD6486}"/>
+              </a:ext>
+            </a:extLst>
+          </p:cNvPr>
+          <p:cNvGrpSpPr/>
+          <p:nvPr/>
+        </p:nvGrpSpPr>
+        <p:grpSpPr>
+          <a:xfrm>
+            <a:off x="-32549" y="-2030575"/>
+            <a:ext cx="6511085" cy="8892385"/>
+            <a:chOff x="-32549" y="-2030575"/>
+            <a:chExt cx="6511085" cy="8892385"/>
+          </a:xfrm>
+        </p:grpSpPr>
+        <p:pic>
+          <p:nvPicPr>
+            <p:cNvPr id="5" name="Picture 4">
+              <a:extLst>
+                <a:ext uri="{FF2B5EF4-FFF2-40B4-BE49-F238E27FC236}">
+                  <a16:creationId xmlns:a16="http://schemas.microsoft.com/office/drawing/2014/main" id="{9D5F1B53-710F-AD3B-ACD3-4B6BF2870AAE}"/>
+                </a:ext>
+              </a:extLst>
+            </p:cNvPr>
+            <p:cNvPicPr>
+              <a:picLocks noChangeAspect="1"/>
+            </p:cNvPicPr>
+            <p:nvPr/>
+          </p:nvPicPr>
+          <p:blipFill>
+            <a:blip r:embed="rId2">
+              <a:extLst>
+                <a:ext uri="{28A0092B-C50C-407E-A947-70E740481C1C}">
+                  <a14:useLocalDpi xmlns:a14="http://schemas.microsoft.com/office/drawing/2010/main" val="0"/>
+                </a:ext>
+              </a:extLst>
+            </a:blip>
+            <a:stretch>
+              <a:fillRect/>
+            </a:stretch>
+          </p:blipFill>
+          <p:spPr>
+            <a:xfrm>
+              <a:off x="-3" y="-2030575"/>
+              <a:ext cx="6478537" cy="3599695"/>
+            </a:xfrm>
+            <a:prstGeom prst="rect">
+              <a:avLst/>
+            </a:prstGeom>
+          </p:spPr>
+        </p:pic>
+        <p:pic>
+          <p:nvPicPr>
+            <p:cNvPr id="18" name="Picture 17">
+              <a:extLst>
+                <a:ext uri="{FF2B5EF4-FFF2-40B4-BE49-F238E27FC236}">
+                  <a16:creationId xmlns:a16="http://schemas.microsoft.com/office/drawing/2014/main" id="{313FF7A6-60C0-7496-0780-504CB704A136}"/>
+                </a:ext>
+              </a:extLst>
+            </p:cNvPr>
+            <p:cNvPicPr>
+              <a:picLocks noChangeAspect="1"/>
+            </p:cNvPicPr>
+            <p:nvPr/>
+          </p:nvPicPr>
+          <p:blipFill>
+            <a:blip r:embed="rId3">
+              <a:extLst>
+                <a:ext uri="{28A0092B-C50C-407E-A947-70E740481C1C}">
+                  <a14:useLocalDpi xmlns:a14="http://schemas.microsoft.com/office/drawing/2010/main" val="0"/>
+                </a:ext>
+              </a:extLst>
+            </a:blip>
+            <a:srcRect/>
+            <a:stretch/>
+          </p:blipFill>
+          <p:spPr>
+            <a:xfrm>
+              <a:off x="-2" y="1162854"/>
+              <a:ext cx="6478537" cy="3238507"/>
+            </a:xfrm>
+            <a:prstGeom prst="rect">
+              <a:avLst/>
+            </a:prstGeom>
+          </p:spPr>
+        </p:pic>
+        <p:pic>
+          <p:nvPicPr>
+            <p:cNvPr id="19" name="Picture 18">
+              <a:extLst>
+                <a:ext uri="{FF2B5EF4-FFF2-40B4-BE49-F238E27FC236}">
+                  <a16:creationId xmlns:a16="http://schemas.microsoft.com/office/drawing/2014/main" id="{76E23561-E60F-A30F-31B2-8D0977207440}"/>
+                </a:ext>
+              </a:extLst>
+            </p:cNvPr>
+            <p:cNvPicPr>
+              <a:picLocks noChangeAspect="1"/>
+            </p:cNvPicPr>
+            <p:nvPr/>
+          </p:nvPicPr>
+          <p:blipFill>
+            <a:blip r:embed="rId2">
+              <a:extLst>
+                <a:ext uri="{28A0092B-C50C-407E-A947-70E740481C1C}">
+                  <a14:useLocalDpi xmlns:a14="http://schemas.microsoft.com/office/drawing/2010/main" val="0"/>
+                </a:ext>
+              </a:extLst>
+            </a:blip>
+            <a:srcRect t="74392"/>
+            <a:stretch>
+              <a:fillRect/>
+            </a:stretch>
+          </p:blipFill>
+          <p:spPr>
+            <a:xfrm>
+              <a:off x="-4" y="247957"/>
+              <a:ext cx="6478537" cy="921810"/>
+            </a:xfrm>
+            <a:prstGeom prst="rect">
+              <a:avLst/>
+            </a:prstGeom>
+          </p:spPr>
+        </p:pic>
+        <p:pic>
+          <p:nvPicPr>
+            <p:cNvPr id="7" name="Picture 6">
+              <a:extLst>
+                <a:ext uri="{FF2B5EF4-FFF2-40B4-BE49-F238E27FC236}">
+                  <a16:creationId xmlns:a16="http://schemas.microsoft.com/office/drawing/2014/main" id="{4D46E6DB-E8D5-CFA2-DE19-5E0DD60D4D7B}"/>
+                </a:ext>
+              </a:extLst>
+            </p:cNvPr>
+            <p:cNvPicPr>
+              <a:picLocks noChangeAspect="1"/>
+            </p:cNvPicPr>
+            <p:nvPr/>
+          </p:nvPicPr>
+          <p:blipFill>
+            <a:blip r:embed="rId4">
+              <a:extLst>
+                <a:ext uri="{28A0092B-C50C-407E-A947-70E740481C1C}">
+                  <a14:useLocalDpi xmlns:a14="http://schemas.microsoft.com/office/drawing/2010/main" val="0"/>
+                </a:ext>
+              </a:extLst>
+            </a:blip>
+            <a:srcRect/>
+            <a:stretch/>
+          </p:blipFill>
+          <p:spPr>
+            <a:xfrm>
+              <a:off x="-1" y="4342633"/>
+              <a:ext cx="6478537" cy="2519177"/>
+            </a:xfrm>
+            <a:prstGeom prst="rect">
+              <a:avLst/>
+            </a:prstGeom>
+          </p:spPr>
+        </p:pic>
+        <p:sp>
+          <p:nvSpPr>
+            <p:cNvPr id="8" name="Oval 7">
+              <a:extLst>
+                <a:ext uri="{FF2B5EF4-FFF2-40B4-BE49-F238E27FC236}">
+                  <a16:creationId xmlns:a16="http://schemas.microsoft.com/office/drawing/2014/main" id="{ED71EDC8-6D51-643D-A342-35BDB405F7D7}"/>
+                </a:ext>
+              </a:extLst>
+            </p:cNvPr>
+            <p:cNvSpPr/>
+            <p:nvPr/>
+          </p:nvSpPr>
+          <p:spPr>
+            <a:xfrm>
+              <a:off x="30478" y="1243733"/>
+              <a:ext cx="109220" cy="116840"/>
+            </a:xfrm>
+            <a:prstGeom prst="ellipse">
+              <a:avLst/>
+            </a:prstGeom>
+            <a:solidFill>
+              <a:schemeClr val="bg1"/>
+            </a:solidFill>
+            <a:ln>
+              <a:noFill/>
+            </a:ln>
+          </p:spPr>
+          <p:style>
+            <a:lnRef idx="2">
+              <a:schemeClr val="accent1">
+                <a:shade val="15000"/>
+              </a:schemeClr>
+            </a:lnRef>
+            <a:fillRef idx="1">
+              <a:schemeClr val="accent1"/>
+            </a:fillRef>
+            <a:effectRef idx="0">
+              <a:schemeClr val="accent1"/>
+            </a:effectRef>
+            <a:fontRef idx="minor">
+              <a:schemeClr val="lt1"/>
+            </a:fontRef>
+          </p:style>
+          <p:txBody>
+            <a:bodyPr rtlCol="0" anchor="ctr"/>
+            <a:lstStyle/>
+            <a:p>
+              <a:pPr algn="ctr"/>
+              <a:r>
+                <a:rPr lang="en-US" sz="1000" b="1" dirty="0">
+                  <a:latin typeface="Arial" panose="020B0604020202020204" pitchFamily="34" charset="0"/>
+                  <a:cs typeface="Arial" panose="020B0604020202020204" pitchFamily="34" charset="0"/>
+                </a:rPr>
+                <a:t>d</a:t>
+              </a:r>
+            </a:p>
+          </p:txBody>
+        </p:sp>
+        <p:sp>
+          <p:nvSpPr>
+            <p:cNvPr id="9" name="Oval 8">
+              <a:extLst>
+                <a:ext uri="{FF2B5EF4-FFF2-40B4-BE49-F238E27FC236}">
+                  <a16:creationId xmlns:a16="http://schemas.microsoft.com/office/drawing/2014/main" id="{68EB16C6-C17E-8D4A-D26A-646B27EC132F}"/>
+                </a:ext>
+              </a:extLst>
+            </p:cNvPr>
+            <p:cNvSpPr/>
+            <p:nvPr/>
+          </p:nvSpPr>
+          <p:spPr>
+            <a:xfrm>
+              <a:off x="107475" y="4481539"/>
+              <a:ext cx="109220" cy="116840"/>
+            </a:xfrm>
+            <a:prstGeom prst="ellipse">
+              <a:avLst/>
+            </a:prstGeom>
+            <a:solidFill>
+              <a:schemeClr val="bg1"/>
+            </a:solidFill>
+            <a:ln>
+              <a:noFill/>
+            </a:ln>
+          </p:spPr>
+          <p:style>
+            <a:lnRef idx="2">
+              <a:schemeClr val="accent1">
+                <a:shade val="15000"/>
+              </a:schemeClr>
+            </a:lnRef>
+            <a:fillRef idx="1">
+              <a:schemeClr val="accent1"/>
+            </a:fillRef>
+            <a:effectRef idx="0">
+              <a:schemeClr val="accent1"/>
+            </a:effectRef>
+            <a:fontRef idx="minor">
+              <a:schemeClr val="lt1"/>
+            </a:fontRef>
+          </p:style>
+          <p:txBody>
+            <a:bodyPr rtlCol="0" anchor="ctr"/>
+            <a:lstStyle/>
+            <a:p>
+              <a:pPr algn="ctr"/>
+              <a:endParaRPr lang="en-US"/>
+            </a:p>
+          </p:txBody>
+        </p:sp>
+        <p:sp>
+          <p:nvSpPr>
+            <p:cNvPr id="10" name="Oval 9">
+              <a:extLst>
+                <a:ext uri="{FF2B5EF4-FFF2-40B4-BE49-F238E27FC236}">
+                  <a16:creationId xmlns:a16="http://schemas.microsoft.com/office/drawing/2014/main" id="{6C92975F-DC7E-B199-0370-504811CB8AF4}"/>
+                </a:ext>
+              </a:extLst>
+            </p:cNvPr>
+            <p:cNvSpPr/>
+            <p:nvPr/>
+          </p:nvSpPr>
+          <p:spPr>
+            <a:xfrm>
+              <a:off x="4416056" y="4493985"/>
+              <a:ext cx="109220" cy="116840"/>
+            </a:xfrm>
+            <a:prstGeom prst="ellipse">
+              <a:avLst/>
+            </a:prstGeom>
+            <a:solidFill>
+              <a:schemeClr val="bg1"/>
+            </a:solidFill>
+            <a:ln>
+              <a:noFill/>
+            </a:ln>
+          </p:spPr>
+          <p:style>
+            <a:lnRef idx="2">
+              <a:schemeClr val="accent1">
+                <a:shade val="15000"/>
+              </a:schemeClr>
+            </a:lnRef>
+            <a:fillRef idx="1">
+              <a:schemeClr val="accent1"/>
+            </a:fillRef>
+            <a:effectRef idx="0">
+              <a:schemeClr val="accent1"/>
+            </a:effectRef>
+            <a:fontRef idx="minor">
+              <a:schemeClr val="lt1"/>
+            </a:fontRef>
+          </p:style>
+          <p:txBody>
+            <a:bodyPr rtlCol="0" anchor="ctr"/>
+            <a:lstStyle/>
+            <a:p>
+              <a:pPr algn="ctr"/>
+              <a:endParaRPr lang="en-US"/>
+            </a:p>
+          </p:txBody>
+        </p:sp>
+        <p:sp>
+          <p:nvSpPr>
+            <p:cNvPr id="11" name="TextBox 10">
+              <a:extLst>
+                <a:ext uri="{FF2B5EF4-FFF2-40B4-BE49-F238E27FC236}">
+                  <a16:creationId xmlns:a16="http://schemas.microsoft.com/office/drawing/2014/main" id="{BD263C1A-14BF-E87D-2939-1E9E3407EE8F}"/>
+                </a:ext>
+              </a:extLst>
+            </p:cNvPr>
+            <p:cNvSpPr txBox="1"/>
+            <p:nvPr/>
+          </p:nvSpPr>
+          <p:spPr>
+            <a:xfrm>
+              <a:off x="-32549" y="1164759"/>
+              <a:ext cx="263214" cy="246221"/>
+            </a:xfrm>
+            <a:prstGeom prst="rect">
+              <a:avLst/>
+            </a:prstGeom>
+            <a:noFill/>
+          </p:spPr>
+          <p:txBody>
+            <a:bodyPr wrap="none" rtlCol="0">
+              <a:spAutoFit/>
+            </a:bodyPr>
+            <a:lstStyle/>
+            <a:p>
+              <a:r>
+                <a:rPr lang="en-US" sz="1000" b="1" dirty="0">
+                  <a:latin typeface="Arial" panose="020B0604020202020204" pitchFamily="34" charset="0"/>
+                  <a:cs typeface="Arial" panose="020B0604020202020204" pitchFamily="34" charset="0"/>
+                </a:rPr>
+                <a:t>d</a:t>
+              </a:r>
+            </a:p>
+          </p:txBody>
+        </p:sp>
+        <p:sp>
+          <p:nvSpPr>
+            <p:cNvPr id="12" name="TextBox 11">
+              <a:extLst>
+                <a:ext uri="{FF2B5EF4-FFF2-40B4-BE49-F238E27FC236}">
+                  <a16:creationId xmlns:a16="http://schemas.microsoft.com/office/drawing/2014/main" id="{D2F9BAE7-CF8A-2FDC-351C-1AFB73521164}"/>
+                </a:ext>
+              </a:extLst>
+            </p:cNvPr>
+            <p:cNvSpPr txBox="1"/>
+            <p:nvPr/>
+          </p:nvSpPr>
+          <p:spPr>
+            <a:xfrm>
+              <a:off x="49528" y="4417483"/>
+              <a:ext cx="255198" cy="246221"/>
+            </a:xfrm>
+            <a:prstGeom prst="rect">
+              <a:avLst/>
+            </a:prstGeom>
+            <a:noFill/>
+          </p:spPr>
+          <p:txBody>
+            <a:bodyPr wrap="none" rtlCol="0">
+              <a:spAutoFit/>
+            </a:bodyPr>
+            <a:lstStyle/>
+            <a:p>
+              <a:r>
+                <a:rPr lang="en-US" sz="1000" b="1" dirty="0">
+                  <a:latin typeface="Arial" panose="020B0604020202020204" pitchFamily="34" charset="0"/>
+                  <a:cs typeface="Arial" panose="020B0604020202020204" pitchFamily="34" charset="0"/>
+                </a:rPr>
+                <a:t>e</a:t>
+              </a:r>
+            </a:p>
+          </p:txBody>
+        </p:sp>
+        <p:sp>
+          <p:nvSpPr>
+            <p:cNvPr id="20" name="Oval 19">
+              <a:extLst>
+                <a:ext uri="{FF2B5EF4-FFF2-40B4-BE49-F238E27FC236}">
+                  <a16:creationId xmlns:a16="http://schemas.microsoft.com/office/drawing/2014/main" id="{D5B2B62B-2DD0-B9A8-9282-9D278D199A79}"/>
+                </a:ext>
+              </a:extLst>
+            </p:cNvPr>
+            <p:cNvSpPr/>
+            <p:nvPr/>
+          </p:nvSpPr>
+          <p:spPr>
+            <a:xfrm>
+              <a:off x="2385417" y="4478998"/>
+              <a:ext cx="109220" cy="116840"/>
+            </a:xfrm>
+            <a:prstGeom prst="ellipse">
+              <a:avLst/>
+            </a:prstGeom>
+            <a:solidFill>
+              <a:schemeClr val="bg1"/>
+            </a:solidFill>
+            <a:ln>
+              <a:noFill/>
+            </a:ln>
+          </p:spPr>
+          <p:style>
+            <a:lnRef idx="2">
+              <a:schemeClr val="accent1">
+                <a:shade val="15000"/>
+              </a:schemeClr>
+            </a:lnRef>
+            <a:fillRef idx="1">
+              <a:schemeClr val="accent1"/>
+            </a:fillRef>
+            <a:effectRef idx="0">
+              <a:schemeClr val="accent1"/>
+            </a:effectRef>
+            <a:fontRef idx="minor">
+              <a:schemeClr val="lt1"/>
+            </a:fontRef>
+          </p:style>
+          <p:txBody>
+            <a:bodyPr rtlCol="0" anchor="ctr"/>
+            <a:lstStyle/>
+            <a:p>
+              <a:pPr algn="ctr"/>
+              <a:endParaRPr lang="en-US"/>
+            </a:p>
+          </p:txBody>
+        </p:sp>
+        <p:sp>
+          <p:nvSpPr>
+            <p:cNvPr id="13" name="TextBox 12">
+              <a:extLst>
+                <a:ext uri="{FF2B5EF4-FFF2-40B4-BE49-F238E27FC236}">
+                  <a16:creationId xmlns:a16="http://schemas.microsoft.com/office/drawing/2014/main" id="{3CCEB87B-EC93-A916-6463-8980CDE9B58A}"/>
+                </a:ext>
+              </a:extLst>
+            </p:cNvPr>
+            <p:cNvSpPr txBox="1"/>
+            <p:nvPr/>
+          </p:nvSpPr>
+          <p:spPr>
+            <a:xfrm>
+              <a:off x="2352723" y="4417483"/>
+              <a:ext cx="227948" cy="246221"/>
+            </a:xfrm>
+            <a:prstGeom prst="rect">
+              <a:avLst/>
+            </a:prstGeom>
+            <a:noFill/>
+          </p:spPr>
+          <p:txBody>
+            <a:bodyPr wrap="none" rtlCol="0">
+              <a:spAutoFit/>
+            </a:bodyPr>
+            <a:lstStyle/>
+            <a:p>
+              <a:r>
+                <a:rPr lang="en-US" sz="1000" b="1" dirty="0">
+                  <a:latin typeface="Arial" panose="020B0604020202020204" pitchFamily="34" charset="0"/>
+                  <a:cs typeface="Arial" panose="020B0604020202020204" pitchFamily="34" charset="0"/>
+                </a:rPr>
+                <a:t>f</a:t>
+              </a:r>
+            </a:p>
+          </p:txBody>
+        </p:sp>
+        <p:sp>
+          <p:nvSpPr>
+            <p:cNvPr id="21" name="TextBox 20">
+              <a:extLst>
+                <a:ext uri="{FF2B5EF4-FFF2-40B4-BE49-F238E27FC236}">
+                  <a16:creationId xmlns:a16="http://schemas.microsoft.com/office/drawing/2014/main" id="{16576459-7AA9-18F0-73CE-B2BAF981B571}"/>
+                </a:ext>
+              </a:extLst>
+            </p:cNvPr>
+            <p:cNvSpPr txBox="1"/>
+            <p:nvPr/>
+          </p:nvSpPr>
+          <p:spPr>
+            <a:xfrm>
+              <a:off x="4345262" y="4417483"/>
+              <a:ext cx="263214" cy="246221"/>
+            </a:xfrm>
+            <a:prstGeom prst="rect">
+              <a:avLst/>
+            </a:prstGeom>
+            <a:noFill/>
+          </p:spPr>
+          <p:txBody>
+            <a:bodyPr wrap="none" rtlCol="0">
+              <a:spAutoFit/>
+            </a:bodyPr>
+            <a:lstStyle/>
+            <a:p>
+              <a:r>
+                <a:rPr lang="en-US" sz="1000" b="1" dirty="0">
+                  <a:latin typeface="Arial" panose="020B0604020202020204" pitchFamily="34" charset="0"/>
+                  <a:cs typeface="Arial" panose="020B0604020202020204" pitchFamily="34" charset="0"/>
+                </a:rPr>
+                <a:t>g</a:t>
+              </a:r>
+            </a:p>
+          </p:txBody>
+        </p:sp>
+      </p:grpSp>
+    </p:spTree>
+    <p:extLst>
+      <p:ext uri="{BB962C8B-B14F-4D97-AF65-F5344CB8AC3E}">
+        <p14:creationId xmlns:p14="http://schemas.microsoft.com/office/powerpoint/2010/main" val="3650395769"/>
       </p:ext>
     </p:extLst>
   </p:cSld>

--- a/Summary_files/myG_datasets.pptx
+++ b/Summary_files/myG_datasets.pptx
@@ -8,6 +8,7 @@
     <p:sldId id="256" r:id="rId2"/>
     <p:sldId id="257" r:id="rId3"/>
     <p:sldId id="258" r:id="rId4"/>
+    <p:sldId id="259" r:id="rId5"/>
   </p:sldIdLst>
   <p:sldSz cx="12192000" cy="6858000"/>
   <p:notesSz cx="6858000" cy="9144000"/>
@@ -117,7 +118,7 @@
 <file path=ppt/revisionInfo.xml><?xml version="1.0" encoding="utf-8"?>
 <p1510:revInfo xmlns:a="http://schemas.openxmlformats.org/drawingml/2006/main" xmlns:r="http://schemas.openxmlformats.org/officeDocument/2006/relationships" xmlns:p1510="http://schemas.microsoft.com/office/powerpoint/2015/10/main">
   <p1510:revLst>
-    <p1510:client id="{1328B3E3-7AB2-4429-BE15-956D6BDF891D}" v="15" dt="2026-03-24T17:04:12.968"/>
+    <p1510:client id="{1328B3E3-7AB2-4429-BE15-956D6BDF891D}" v="16" dt="2026-03-24T23:04:51.214"/>
   </p1510:revLst>
 </p1510:revInfo>
 </file>
@@ -151,7 +152,7 @@
   <pc:docChgLst>
     <pc:chgData name="Osuna Caballero, Salvador" userId="31a72479-bada-497d-8d52-8135df6f40fd" providerId="ADAL" clId="{A193FB44-5427-4021-BB49-C378ACCCCB1C}"/>
     <pc:docChg chg="undo custSel addSld modSld">
-      <pc:chgData name="Osuna Caballero, Salvador" userId="31a72479-bada-497d-8d52-8135df6f40fd" providerId="ADAL" clId="{A193FB44-5427-4021-BB49-C378ACCCCB1C}" dt="2026-03-24T17:04:12.968" v="204" actId="164"/>
+      <pc:chgData name="Osuna Caballero, Salvador" userId="31a72479-bada-497d-8d52-8135df6f40fd" providerId="ADAL" clId="{A193FB44-5427-4021-BB49-C378ACCCCB1C}" dt="2026-03-24T23:04:51.214" v="243" actId="164"/>
       <pc:docMkLst>
         <pc:docMk/>
       </pc:docMkLst>
@@ -287,6 +288,101 @@
             <pc:docMk/>
             <pc:sldMk cId="3650395769" sldId="258"/>
             <ac:picMk id="19" creationId="{76E23561-E60F-A30F-31B2-8D0977207440}"/>
+          </ac:picMkLst>
+        </pc:picChg>
+      </pc:sldChg>
+      <pc:sldChg chg="addSp delSp modSp new mod">
+        <pc:chgData name="Osuna Caballero, Salvador" userId="31a72479-bada-497d-8d52-8135df6f40fd" providerId="ADAL" clId="{A193FB44-5427-4021-BB49-C378ACCCCB1C}" dt="2026-03-24T23:04:51.214" v="243" actId="164"/>
+        <pc:sldMkLst>
+          <pc:docMk/>
+          <pc:sldMk cId="4188754719" sldId="259"/>
+        </pc:sldMkLst>
+        <pc:spChg chg="del">
+          <ac:chgData name="Osuna Caballero, Salvador" userId="31a72479-bada-497d-8d52-8135df6f40fd" providerId="ADAL" clId="{A193FB44-5427-4021-BB49-C378ACCCCB1C}" dt="2026-03-24T22:58:14.246" v="207" actId="478"/>
+          <ac:spMkLst>
+            <pc:docMk/>
+            <pc:sldMk cId="4188754719" sldId="259"/>
+            <ac:spMk id="2" creationId="{F1A10A48-0BDE-5CEF-61E1-C12A568A7966}"/>
+          </ac:spMkLst>
+        </pc:spChg>
+        <pc:spChg chg="del">
+          <ac:chgData name="Osuna Caballero, Salvador" userId="31a72479-bada-497d-8d52-8135df6f40fd" providerId="ADAL" clId="{A193FB44-5427-4021-BB49-C378ACCCCB1C}" dt="2026-03-24T22:58:13.408" v="206" actId="478"/>
+          <ac:spMkLst>
+            <pc:docMk/>
+            <pc:sldMk cId="4188754719" sldId="259"/>
+            <ac:spMk id="3" creationId="{9C3A9F08-B69D-1259-84AC-9F7D8B9F86DB}"/>
+          </ac:spMkLst>
+        </pc:spChg>
+        <pc:grpChg chg="add mod">
+          <ac:chgData name="Osuna Caballero, Salvador" userId="31a72479-bada-497d-8d52-8135df6f40fd" providerId="ADAL" clId="{A193FB44-5427-4021-BB49-C378ACCCCB1C}" dt="2026-03-24T23:04:51.214" v="243" actId="164"/>
+          <ac:grpSpMkLst>
+            <pc:docMk/>
+            <pc:sldMk cId="4188754719" sldId="259"/>
+            <ac:grpSpMk id="20" creationId="{9EE90FA6-0FA3-5CB6-AE6F-2115E3F6E4C0}"/>
+          </ac:grpSpMkLst>
+        </pc:grpChg>
+        <pc:picChg chg="add del mod">
+          <ac:chgData name="Osuna Caballero, Salvador" userId="31a72479-bada-497d-8d52-8135df6f40fd" providerId="ADAL" clId="{A193FB44-5427-4021-BB49-C378ACCCCB1C}" dt="2026-03-24T22:59:34.171" v="213" actId="478"/>
+          <ac:picMkLst>
+            <pc:docMk/>
+            <pc:sldMk cId="4188754719" sldId="259"/>
+            <ac:picMk id="5" creationId="{3AD62A0A-BABE-9C50-BA19-46D1E632639D}"/>
+          </ac:picMkLst>
+        </pc:picChg>
+        <pc:picChg chg="add del mod">
+          <ac:chgData name="Osuna Caballero, Salvador" userId="31a72479-bada-497d-8d52-8135df6f40fd" providerId="ADAL" clId="{A193FB44-5427-4021-BB49-C378ACCCCB1C}" dt="2026-03-24T23:03:17.557" v="229" actId="478"/>
+          <ac:picMkLst>
+            <pc:docMk/>
+            <pc:sldMk cId="4188754719" sldId="259"/>
+            <ac:picMk id="7" creationId="{193AD785-E1C5-6DBA-5950-089350F6F4F4}"/>
+          </ac:picMkLst>
+        </pc:picChg>
+        <pc:picChg chg="add del mod">
+          <ac:chgData name="Osuna Caballero, Salvador" userId="31a72479-bada-497d-8d52-8135df6f40fd" providerId="ADAL" clId="{A193FB44-5427-4021-BB49-C378ACCCCB1C}" dt="2026-03-24T23:01:28.149" v="220" actId="478"/>
+          <ac:picMkLst>
+            <pc:docMk/>
+            <pc:sldMk cId="4188754719" sldId="259"/>
+            <ac:picMk id="9" creationId="{7A0AC68A-A4CF-0B32-4414-133DFBF9C3D8}"/>
+          </ac:picMkLst>
+        </pc:picChg>
+        <pc:picChg chg="add del mod">
+          <ac:chgData name="Osuna Caballero, Salvador" userId="31a72479-bada-497d-8d52-8135df6f40fd" providerId="ADAL" clId="{A193FB44-5427-4021-BB49-C378ACCCCB1C}" dt="2026-03-24T23:02:11.306" v="224" actId="478"/>
+          <ac:picMkLst>
+            <pc:docMk/>
+            <pc:sldMk cId="4188754719" sldId="259"/>
+            <ac:picMk id="11" creationId="{D26B0780-EB7E-8020-356A-2F23BF6A92F4}"/>
+          </ac:picMkLst>
+        </pc:picChg>
+        <pc:picChg chg="add del mod">
+          <ac:chgData name="Osuna Caballero, Salvador" userId="31a72479-bada-497d-8d52-8135df6f40fd" providerId="ADAL" clId="{A193FB44-5427-4021-BB49-C378ACCCCB1C}" dt="2026-03-24T23:03:17.096" v="228" actId="478"/>
+          <ac:picMkLst>
+            <pc:docMk/>
+            <pc:sldMk cId="4188754719" sldId="259"/>
+            <ac:picMk id="13" creationId="{7C4995CA-0F6F-F140-B39B-F0E9C5035B49}"/>
+          </ac:picMkLst>
+        </pc:picChg>
+        <pc:picChg chg="add mod">
+          <ac:chgData name="Osuna Caballero, Salvador" userId="31a72479-bada-497d-8d52-8135df6f40fd" providerId="ADAL" clId="{A193FB44-5427-4021-BB49-C378ACCCCB1C}" dt="2026-03-24T23:04:51.214" v="243" actId="164"/>
+          <ac:picMkLst>
+            <pc:docMk/>
+            <pc:sldMk cId="4188754719" sldId="259"/>
+            <ac:picMk id="15" creationId="{0D7F3D8C-4826-4D01-6A21-DBEED600BDA6}"/>
+          </ac:picMkLst>
+        </pc:picChg>
+        <pc:picChg chg="add mod modCrop">
+          <ac:chgData name="Osuna Caballero, Salvador" userId="31a72479-bada-497d-8d52-8135df6f40fd" providerId="ADAL" clId="{A193FB44-5427-4021-BB49-C378ACCCCB1C}" dt="2026-03-24T23:04:51.214" v="243" actId="164"/>
+          <ac:picMkLst>
+            <pc:docMk/>
+            <pc:sldMk cId="4188754719" sldId="259"/>
+            <ac:picMk id="17" creationId="{95ABD43E-D1D3-93BE-5169-3AF23D8914C9}"/>
+          </ac:picMkLst>
+        </pc:picChg>
+        <pc:picChg chg="add del mod">
+          <ac:chgData name="Osuna Caballero, Salvador" userId="31a72479-bada-497d-8d52-8135df6f40fd" providerId="ADAL" clId="{A193FB44-5427-4021-BB49-C378ACCCCB1C}" dt="2026-03-24T23:04:29.193" v="241" actId="478"/>
+          <ac:picMkLst>
+            <pc:docMk/>
+            <pc:sldMk cId="4188754719" sldId="259"/>
+            <ac:picMk id="19" creationId="{339066DE-E4D7-F2E1-5307-C551C2768F67}"/>
           </ac:picMkLst>
         </pc:picChg>
       </pc:sldChg>
@@ -5647,6 +5743,130 @@
 </p:sld>
 </file>
 
+<file path=ppt/slides/slide4.xml><?xml version="1.0" encoding="utf-8"?>
+<p:sld xmlns:a="http://schemas.openxmlformats.org/drawingml/2006/main" xmlns:r="http://schemas.openxmlformats.org/officeDocument/2006/relationships" xmlns:p="http://schemas.openxmlformats.org/presentationml/2006/main">
+  <p:cSld>
+    <p:spTree>
+      <p:nvGrpSpPr>
+        <p:cNvPr id="1" name=""/>
+        <p:cNvGrpSpPr/>
+        <p:nvPr/>
+      </p:nvGrpSpPr>
+      <p:grpSpPr>
+        <a:xfrm>
+          <a:off x="0" y="0"/>
+          <a:ext cx="0" cy="0"/>
+          <a:chOff x="0" y="0"/>
+          <a:chExt cx="0" cy="0"/>
+        </a:xfrm>
+      </p:grpSpPr>
+      <p:grpSp>
+        <p:nvGrpSpPr>
+          <p:cNvPr id="20" name="Group 19">
+            <a:extLst>
+              <a:ext uri="{FF2B5EF4-FFF2-40B4-BE49-F238E27FC236}">
+                <a16:creationId xmlns:a16="http://schemas.microsoft.com/office/drawing/2014/main" id="{9EE90FA6-0FA3-5CB6-AE6F-2115E3F6E4C0}"/>
+              </a:ext>
+            </a:extLst>
+          </p:cNvPr>
+          <p:cNvGrpSpPr/>
+          <p:nvPr/>
+        </p:nvGrpSpPr>
+        <p:grpSpPr>
+          <a:xfrm>
+            <a:off x="0" y="0"/>
+            <a:ext cx="6118872" cy="6858000"/>
+            <a:chOff x="0" y="0"/>
+            <a:chExt cx="6118872" cy="6858000"/>
+          </a:xfrm>
+        </p:grpSpPr>
+        <p:pic>
+          <p:nvPicPr>
+            <p:cNvPr id="15" name="Picture 14">
+              <a:extLst>
+                <a:ext uri="{FF2B5EF4-FFF2-40B4-BE49-F238E27FC236}">
+                  <a16:creationId xmlns:a16="http://schemas.microsoft.com/office/drawing/2014/main" id="{0D7F3D8C-4826-4D01-6A21-DBEED600BDA6}"/>
+                </a:ext>
+              </a:extLst>
+            </p:cNvPr>
+            <p:cNvPicPr>
+              <a:picLocks noChangeAspect="1"/>
+            </p:cNvPicPr>
+            <p:nvPr/>
+          </p:nvPicPr>
+          <p:blipFill>
+            <a:blip r:embed="rId2">
+              <a:extLst>
+                <a:ext uri="{28A0092B-C50C-407E-A947-70E740481C1C}">
+                  <a14:useLocalDpi xmlns:a14="http://schemas.microsoft.com/office/drawing/2010/main" val="0"/>
+                </a:ext>
+              </a:extLst>
+            </a:blip>
+            <a:stretch>
+              <a:fillRect/>
+            </a:stretch>
+          </p:blipFill>
+          <p:spPr>
+            <a:xfrm>
+              <a:off x="0" y="0"/>
+              <a:ext cx="6118872" cy="2519177"/>
+            </a:xfrm>
+            <a:prstGeom prst="rect">
+              <a:avLst/>
+            </a:prstGeom>
+          </p:spPr>
+        </p:pic>
+        <p:pic>
+          <p:nvPicPr>
+            <p:cNvPr id="17" name="Picture 16">
+              <a:extLst>
+                <a:ext uri="{FF2B5EF4-FFF2-40B4-BE49-F238E27FC236}">
+                  <a16:creationId xmlns:a16="http://schemas.microsoft.com/office/drawing/2014/main" id="{95ABD43E-D1D3-93BE-5169-3AF23D8914C9}"/>
+                </a:ext>
+              </a:extLst>
+            </p:cNvPr>
+            <p:cNvPicPr>
+              <a:picLocks noChangeAspect="1"/>
+            </p:cNvPicPr>
+            <p:nvPr/>
+          </p:nvPicPr>
+          <p:blipFill>
+            <a:blip r:embed="rId3">
+              <a:extLst>
+                <a:ext uri="{28A0092B-C50C-407E-A947-70E740481C1C}">
+                  <a14:useLocalDpi xmlns:a14="http://schemas.microsoft.com/office/drawing/2010/main" val="0"/>
+                </a:ext>
+              </a:extLst>
+            </a:blip>
+            <a:srcRect t="2047"/>
+            <a:stretch>
+              <a:fillRect/>
+            </a:stretch>
+          </p:blipFill>
+          <p:spPr>
+            <a:xfrm>
+              <a:off x="0" y="2275114"/>
+              <a:ext cx="6118872" cy="4582886"/>
+            </a:xfrm>
+            <a:prstGeom prst="rect">
+              <a:avLst/>
+            </a:prstGeom>
+          </p:spPr>
+        </p:pic>
+      </p:grpSp>
+    </p:spTree>
+    <p:extLst>
+      <p:ext uri="{BB962C8B-B14F-4D97-AF65-F5344CB8AC3E}">
+        <p14:creationId xmlns:p14="http://schemas.microsoft.com/office/powerpoint/2010/main" val="4188754719"/>
+      </p:ext>
+    </p:extLst>
+  </p:cSld>
+  <p:clrMapOvr>
+    <a:masterClrMapping/>
+  </p:clrMapOvr>
+</p:sld>
+</file>
+
 <file path=ppt/theme/theme1.xml><?xml version="1.0" encoding="utf-8"?>
 <a:theme xmlns:a="http://schemas.openxmlformats.org/drawingml/2006/main" name="Office Theme">
   <a:themeElements>
